--- a/22-dars - Taqdimotlar bilan ishlash. Offline va online dasturlar (PowerPoint va Google Slides)/22-dars - Slayd.pptx
+++ b/22-dars - Taqdimotlar bilan ishlash. Offline va online dasturlar (PowerPoint va Google Slides)/22-dars - Slayd.pptx
@@ -4381,7 +4381,7 @@
                 <a:ea typeface="Calibri" pitchFamily="34" charset="-122"/>
                 <a:cs typeface="Calibri" pitchFamily="34" charset="-120"/>
               </a:rPr>
-              <a:t>Har bir slaydда kam matn, ko'p ko'rgazma qoidasiga amal qil.</a:t>
+              <a:t>Har bir slaydda kam matn, ko'p ko'rgazma qoidasiga amal qil.</a:t>
             </a:r>
             <a:endParaRPr lang="en-US" sz="1350" dirty="0"/>
           </a:p>
